--- a/presentations/research-hr-identity-dns/Research_HR_Identity_DNS_Narrated.pptx
+++ b/presentations/research-hr-identity-dns/Research_HR_Identity_DNS_Narrated.pptx
@@ -171,7 +171,7 @@
     </p:spTree>
     <p:extLst>
       <p:ext uri="{BB962C8B-B14F-4D97-AF65-F5344CB8AC3E}">
-        <p14:creationId xmlns:p14="http://schemas.microsoft.com/office/powerpoint/2010/main" val="647970184"/>
+        <p14:creationId xmlns:p14="http://schemas.microsoft.com/office/powerpoint/2010/main" val="2867554841"/>
       </p:ext>
     </p:extLst>
   </p:cSld>
@@ -2332,7 +2332,7 @@
             <a:hlinkClick r:id="" action="ppaction://media"/>
             <a:extLst>
               <a:ext uri="{FF2B5EF4-FFF2-40B4-BE49-F238E27FC236}">
-                <a16:creationId xmlns:a16="http://schemas.microsoft.com/office/drawing/2014/main" id="{61BC2ECF-435A-ADE8-B1D2-B98806A9999F}"/>
+                <a16:creationId xmlns:a16="http://schemas.microsoft.com/office/drawing/2014/main" id="{978B0059-CCDC-A3AD-1A2D-36B214F619EC}"/>
               </a:ext>
             </a:extLst>
           </p:cNvPr>
@@ -2348,7 +2348,7 @@
                     <p:ext uri="{3AFAAA56-56D3-431D-BCD4-E75A35582382}">
                       <p173:tracksInfo xmlns:p173="http://schemas.microsoft.com/office/powerpoint/2017/3/main" displayLoc="slide">
                         <p173:trackLst>
-                          <p173:track id="{0994EA4E-513D-45D3-8E3F-241ACC71AA12}" label="English (captions)" lang="en-US" r:embed="rId6"/>
+                          <p173:track id="{A9732B28-706D-4505-ADC2-4DD45824230B}" label="English (captions)" lang="en-US" r:embed="rId6"/>
                         </p173:trackLst>
                       </p173:tracksInfo>
                     </p:ext>
@@ -2366,7 +2366,7 @@
         </p:blipFill>
         <p:spPr>
           <a:xfrm>
-            <a:off x="127000" y="6350000"/>
+            <a:off x="12446000" y="127000"/>
             <a:ext cx="304800" cy="304800"/>
           </a:xfrm>
           <a:prstGeom prst="rect">
@@ -4373,7 +4373,7 @@
             <a:hlinkClick r:id="" action="ppaction://media"/>
             <a:extLst>
               <a:ext uri="{FF2B5EF4-FFF2-40B4-BE49-F238E27FC236}">
-                <a16:creationId xmlns:a16="http://schemas.microsoft.com/office/drawing/2014/main" id="{008A1D5E-36BD-360A-7852-46580A10B337}"/>
+                <a16:creationId xmlns:a16="http://schemas.microsoft.com/office/drawing/2014/main" id="{7EF42450-9D93-714A-7561-627965BBDA0E}"/>
               </a:ext>
             </a:extLst>
           </p:cNvPr>
@@ -4389,7 +4389,7 @@
                     <p:ext uri="{3AFAAA56-56D3-431D-BCD4-E75A35582382}">
                       <p173:tracksInfo xmlns:p173="http://schemas.microsoft.com/office/powerpoint/2017/3/main" displayLoc="slide">
                         <p173:trackLst>
-                          <p173:track id="{9DC51EA1-F5A2-4023-84E7-9C3D3B750614}" label="English (captions)" lang="en-US" r:embed="rId6"/>
+                          <p173:track id="{D1101E85-38BD-46AA-8BC8-D3E5D8E6AA82}" label="English (captions)" lang="en-US" r:embed="rId6"/>
                         </p173:trackLst>
                       </p173:tracksInfo>
                     </p:ext>
@@ -4407,7 +4407,7 @@
         </p:blipFill>
         <p:spPr>
           <a:xfrm>
-            <a:off x="127000" y="6350000"/>
+            <a:off x="12446000" y="127000"/>
             <a:ext cx="304800" cy="304800"/>
           </a:xfrm>
           <a:prstGeom prst="rect">
@@ -5287,7 +5287,7 @@
             <a:hlinkClick r:id="" action="ppaction://media"/>
             <a:extLst>
               <a:ext uri="{FF2B5EF4-FFF2-40B4-BE49-F238E27FC236}">
-                <a16:creationId xmlns:a16="http://schemas.microsoft.com/office/drawing/2014/main" id="{C0C450B1-2232-922C-8FE1-4CA5ECA4EDF4}"/>
+                <a16:creationId xmlns:a16="http://schemas.microsoft.com/office/drawing/2014/main" id="{3AB91FAE-E332-62FE-9AA4-E91B2F33094F}"/>
               </a:ext>
             </a:extLst>
           </p:cNvPr>
@@ -5303,7 +5303,7 @@
                     <p:ext uri="{3AFAAA56-56D3-431D-BCD4-E75A35582382}">
                       <p173:tracksInfo xmlns:p173="http://schemas.microsoft.com/office/powerpoint/2017/3/main" displayLoc="slide">
                         <p173:trackLst>
-                          <p173:track id="{649D5EC6-DA76-4C09-BC26-338005B94315}" label="English (captions)" lang="en-US" r:embed="rId6"/>
+                          <p173:track id="{772AEE6C-BFED-4472-B46E-B7362CCAD302}" label="English (captions)" lang="en-US" r:embed="rId6"/>
                         </p173:trackLst>
                       </p173:tracksInfo>
                     </p:ext>
@@ -5321,7 +5321,7 @@
         </p:blipFill>
         <p:spPr>
           <a:xfrm>
-            <a:off x="127000" y="6350000"/>
+            <a:off x="12446000" y="127000"/>
             <a:ext cx="304800" cy="304800"/>
           </a:xfrm>
           <a:prstGeom prst="rect">
@@ -6121,7 +6121,7 @@
             <a:hlinkClick r:id="" action="ppaction://media"/>
             <a:extLst>
               <a:ext uri="{FF2B5EF4-FFF2-40B4-BE49-F238E27FC236}">
-                <a16:creationId xmlns:a16="http://schemas.microsoft.com/office/drawing/2014/main" id="{3BB69160-9552-FEEF-3B38-B5C17759F78C}"/>
+                <a16:creationId xmlns:a16="http://schemas.microsoft.com/office/drawing/2014/main" id="{BE309411-C5B2-92C6-E272-FCF847BD6924}"/>
               </a:ext>
             </a:extLst>
           </p:cNvPr>
@@ -6137,7 +6137,7 @@
                     <p:ext uri="{3AFAAA56-56D3-431D-BCD4-E75A35582382}">
                       <p173:tracksInfo xmlns:p173="http://schemas.microsoft.com/office/powerpoint/2017/3/main" displayLoc="slide">
                         <p173:trackLst>
-                          <p173:track id="{2C7544D7-C2D4-447D-8597-A2DA1478DA60}" label="English (captions)" lang="en-US" r:embed="rId6"/>
+                          <p173:track id="{126FBE8D-B786-4DDE-946A-6F254764EB00}" label="English (captions)" lang="en-US" r:embed="rId6"/>
                         </p173:trackLst>
                       </p173:tracksInfo>
                     </p:ext>
@@ -6155,7 +6155,7 @@
         </p:blipFill>
         <p:spPr>
           <a:xfrm>
-            <a:off x="127000" y="6350000"/>
+            <a:off x="12446000" y="127000"/>
             <a:ext cx="304800" cy="304800"/>
           </a:xfrm>
           <a:prstGeom prst="rect">
@@ -7597,7 +7597,7 @@
             <a:hlinkClick r:id="" action="ppaction://media"/>
             <a:extLst>
               <a:ext uri="{FF2B5EF4-FFF2-40B4-BE49-F238E27FC236}">
-                <a16:creationId xmlns:a16="http://schemas.microsoft.com/office/drawing/2014/main" id="{74AC6D18-51D9-38E8-2FB0-E6F741DF1432}"/>
+                <a16:creationId xmlns:a16="http://schemas.microsoft.com/office/drawing/2014/main" id="{4AE86388-66AC-DFEA-196D-2BF7B36FB0F8}"/>
               </a:ext>
             </a:extLst>
           </p:cNvPr>
@@ -7613,7 +7613,7 @@
                     <p:ext uri="{3AFAAA56-56D3-431D-BCD4-E75A35582382}">
                       <p173:tracksInfo xmlns:p173="http://schemas.microsoft.com/office/powerpoint/2017/3/main" displayLoc="slide">
                         <p173:trackLst>
-                          <p173:track id="{C9E2AD52-8859-4E0B-A715-DCF2465ED1DF}" label="English (captions)" lang="en-US" r:embed="rId7"/>
+                          <p173:track id="{36B26B65-CF7D-4458-B5AD-9778E4463EEB}" label="English (captions)" lang="en-US" r:embed="rId7"/>
                         </p173:trackLst>
                       </p173:tracksInfo>
                     </p:ext>
@@ -7631,7 +7631,7 @@
         </p:blipFill>
         <p:spPr>
           <a:xfrm>
-            <a:off x="127000" y="6350000"/>
+            <a:off x="12446000" y="127000"/>
             <a:ext cx="304800" cy="304800"/>
           </a:xfrm>
           <a:prstGeom prst="rect">
@@ -8476,7 +8476,7 @@
             <a:hlinkClick r:id="" action="ppaction://media"/>
             <a:extLst>
               <a:ext uri="{FF2B5EF4-FFF2-40B4-BE49-F238E27FC236}">
-                <a16:creationId xmlns:a16="http://schemas.microsoft.com/office/drawing/2014/main" id="{063A4710-294F-97E7-F711-979E3592E3B0}"/>
+                <a16:creationId xmlns:a16="http://schemas.microsoft.com/office/drawing/2014/main" id="{923DE815-F9FC-59C1-05EA-4F93FEF09E44}"/>
               </a:ext>
             </a:extLst>
           </p:cNvPr>
@@ -8492,7 +8492,7 @@
                     <p:ext uri="{3AFAAA56-56D3-431D-BCD4-E75A35582382}">
                       <p173:tracksInfo xmlns:p173="http://schemas.microsoft.com/office/powerpoint/2017/3/main" displayLoc="slide">
                         <p173:trackLst>
-                          <p173:track id="{3F404DEE-4776-4EA6-A1FC-13ECDF5D3112}" label="English (captions)" lang="en-US" r:embed="rId7"/>
+                          <p173:track id="{14BEF010-DE08-47F4-9430-CAB6E37E4C33}" label="English (captions)" lang="en-US" r:embed="rId7"/>
                         </p173:trackLst>
                       </p173:tracksInfo>
                     </p:ext>
@@ -8510,7 +8510,7 @@
         </p:blipFill>
         <p:spPr>
           <a:xfrm>
-            <a:off x="127000" y="6350000"/>
+            <a:off x="12446000" y="127000"/>
             <a:ext cx="304800" cy="304800"/>
           </a:xfrm>
           <a:prstGeom prst="rect">
@@ -11642,7 +11642,7 @@
             <a:hlinkClick r:id="" action="ppaction://media"/>
             <a:extLst>
               <a:ext uri="{FF2B5EF4-FFF2-40B4-BE49-F238E27FC236}">
-                <a16:creationId xmlns:a16="http://schemas.microsoft.com/office/drawing/2014/main" id="{BD97A790-C699-2E4E-C0BE-BA2511061E70}"/>
+                <a16:creationId xmlns:a16="http://schemas.microsoft.com/office/drawing/2014/main" id="{6186E30B-E45B-1591-E444-EC94DD144542}"/>
               </a:ext>
             </a:extLst>
           </p:cNvPr>
@@ -11658,7 +11658,7 @@
                     <p:ext uri="{3AFAAA56-56D3-431D-BCD4-E75A35582382}">
                       <p173:tracksInfo xmlns:p173="http://schemas.microsoft.com/office/powerpoint/2017/3/main" displayLoc="slide">
                         <p173:trackLst>
-                          <p173:track id="{2348E13C-DDDD-4919-9F17-77DDA09562E5}" label="English (captions)" lang="en-US" r:embed="rId6"/>
+                          <p173:track id="{FCF00819-630E-4432-BA81-11F1C2A014B6}" label="English (captions)" lang="en-US" r:embed="rId6"/>
                         </p173:trackLst>
                       </p173:tracksInfo>
                     </p:ext>
@@ -11676,7 +11676,7 @@
         </p:blipFill>
         <p:spPr>
           <a:xfrm>
-            <a:off x="127000" y="6350000"/>
+            <a:off x="12446000" y="127000"/>
             <a:ext cx="304800" cy="304800"/>
           </a:xfrm>
           <a:prstGeom prst="rect">
@@ -13773,7 +13773,7 @@
             <a:hlinkClick r:id="" action="ppaction://media"/>
             <a:extLst>
               <a:ext uri="{FF2B5EF4-FFF2-40B4-BE49-F238E27FC236}">
-                <a16:creationId xmlns:a16="http://schemas.microsoft.com/office/drawing/2014/main" id="{C7A734DA-AC93-6F2D-8401-2AA1BECAFA2E}"/>
+                <a16:creationId xmlns:a16="http://schemas.microsoft.com/office/drawing/2014/main" id="{CE86ADA7-6EB6-A9FC-8871-D590C8283CA9}"/>
               </a:ext>
             </a:extLst>
           </p:cNvPr>
@@ -13789,7 +13789,7 @@
                     <p:ext uri="{3AFAAA56-56D3-431D-BCD4-E75A35582382}">
                       <p173:tracksInfo xmlns:p173="http://schemas.microsoft.com/office/powerpoint/2017/3/main" displayLoc="slide">
                         <p173:trackLst>
-                          <p173:track id="{A915F4C1-4AB3-4A0F-BFD9-8198B8AE9B07}" label="English (captions)" lang="en-US" r:embed="rId6"/>
+                          <p173:track id="{548F7314-EEF3-4967-B6F1-2EF05A6F82E6}" label="English (captions)" lang="en-US" r:embed="rId6"/>
                         </p173:trackLst>
                       </p173:tracksInfo>
                     </p:ext>
@@ -13807,7 +13807,7 @@
         </p:blipFill>
         <p:spPr>
           <a:xfrm>
-            <a:off x="127000" y="6350000"/>
+            <a:off x="12446000" y="127000"/>
             <a:ext cx="304800" cy="304800"/>
           </a:xfrm>
           <a:prstGeom prst="rect">
@@ -14966,7 +14966,7 @@
             <a:hlinkClick r:id="" action="ppaction://media"/>
             <a:extLst>
               <a:ext uri="{FF2B5EF4-FFF2-40B4-BE49-F238E27FC236}">
-                <a16:creationId xmlns:a16="http://schemas.microsoft.com/office/drawing/2014/main" id="{1FC41375-4C15-A6C0-328D-910FD1642C95}"/>
+                <a16:creationId xmlns:a16="http://schemas.microsoft.com/office/drawing/2014/main" id="{762FC635-CAA0-11B5-A4BF-02A40E161B2D}"/>
               </a:ext>
             </a:extLst>
           </p:cNvPr>
@@ -14982,7 +14982,7 @@
                     <p:ext uri="{3AFAAA56-56D3-431D-BCD4-E75A35582382}">
                       <p173:tracksInfo xmlns:p173="http://schemas.microsoft.com/office/powerpoint/2017/3/main" displayLoc="slide">
                         <p173:trackLst>
-                          <p173:track id="{861C7E3C-EF91-49C5-89C5-E77D3E579349}" label="English (captions)" lang="en-US" r:embed="rId6"/>
+                          <p173:track id="{7F7D5062-327F-47A2-89DB-314DFE627B8D}" label="English (captions)" lang="en-US" r:embed="rId6"/>
                         </p173:trackLst>
                       </p173:tracksInfo>
                     </p:ext>
@@ -15000,7 +15000,7 @@
         </p:blipFill>
         <p:spPr>
           <a:xfrm>
-            <a:off x="127000" y="6350000"/>
+            <a:off x="12446000" y="127000"/>
             <a:ext cx="304800" cy="304800"/>
           </a:xfrm>
           <a:prstGeom prst="rect">
@@ -15834,7 +15834,7 @@
             <a:hlinkClick r:id="" action="ppaction://media"/>
             <a:extLst>
               <a:ext uri="{FF2B5EF4-FFF2-40B4-BE49-F238E27FC236}">
-                <a16:creationId xmlns:a16="http://schemas.microsoft.com/office/drawing/2014/main" id="{73CCB982-01AF-41E3-E564-45E99E462379}"/>
+                <a16:creationId xmlns:a16="http://schemas.microsoft.com/office/drawing/2014/main" id="{33A9FA56-D052-A293-B1BD-C725DEDBFBF9}"/>
               </a:ext>
             </a:extLst>
           </p:cNvPr>
@@ -15850,7 +15850,7 @@
                     <p:ext uri="{3AFAAA56-56D3-431D-BCD4-E75A35582382}">
                       <p173:tracksInfo xmlns:p173="http://schemas.microsoft.com/office/powerpoint/2017/3/main" displayLoc="slide">
                         <p173:trackLst>
-                          <p173:track id="{3E3AD79E-9413-48B0-B7CB-5AD14FB09094}" label="English (captions)" lang="en-US" r:embed="rId6"/>
+                          <p173:track id="{55D5D112-AEC5-479F-A51F-4F1DE58B6AB3}" label="English (captions)" lang="en-US" r:embed="rId6"/>
                         </p173:trackLst>
                       </p173:tracksInfo>
                     </p:ext>
@@ -15868,7 +15868,7 @@
         </p:blipFill>
         <p:spPr>
           <a:xfrm>
-            <a:off x="127000" y="6350000"/>
+            <a:off x="12446000" y="127000"/>
             <a:ext cx="304800" cy="304800"/>
           </a:xfrm>
           <a:prstGeom prst="rect">
@@ -16818,7 +16818,7 @@
             <a:hlinkClick r:id="" action="ppaction://media"/>
             <a:extLst>
               <a:ext uri="{FF2B5EF4-FFF2-40B4-BE49-F238E27FC236}">
-                <a16:creationId xmlns:a16="http://schemas.microsoft.com/office/drawing/2014/main" id="{80E1CDAE-F992-7540-AD74-365CBFCD4FB7}"/>
+                <a16:creationId xmlns:a16="http://schemas.microsoft.com/office/drawing/2014/main" id="{B105256D-CAE7-2C4C-5B64-A34F013EFFCA}"/>
               </a:ext>
             </a:extLst>
           </p:cNvPr>
@@ -16834,7 +16834,7 @@
                     <p:ext uri="{3AFAAA56-56D3-431D-BCD4-E75A35582382}">
                       <p173:tracksInfo xmlns:p173="http://schemas.microsoft.com/office/powerpoint/2017/3/main" displayLoc="slide">
                         <p173:trackLst>
-                          <p173:track id="{740FC7C9-75B4-4744-B677-315AC6AC97DE}" label="English (captions)" lang="en-US" r:embed="rId7"/>
+                          <p173:track id="{69CB15E3-AD46-496A-86DB-5454F8037FCC}" label="English (captions)" lang="en-US" r:embed="rId7"/>
                         </p173:trackLst>
                       </p173:tracksInfo>
                     </p:ext>
@@ -16852,7 +16852,7 @@
         </p:blipFill>
         <p:spPr>
           <a:xfrm>
-            <a:off x="127000" y="6350000"/>
+            <a:off x="12446000" y="127000"/>
             <a:ext cx="304800" cy="304800"/>
           </a:xfrm>
           <a:prstGeom prst="rect">
@@ -18897,7 +18897,7 @@
             <a:hlinkClick r:id="" action="ppaction://media"/>
             <a:extLst>
               <a:ext uri="{FF2B5EF4-FFF2-40B4-BE49-F238E27FC236}">
-                <a16:creationId xmlns:a16="http://schemas.microsoft.com/office/drawing/2014/main" id="{1D469E8D-FA4C-0F8F-9285-C87D3F4FDBBB}"/>
+                <a16:creationId xmlns:a16="http://schemas.microsoft.com/office/drawing/2014/main" id="{229AB9D3-C399-8F10-7793-B5E5E91DBA8F}"/>
               </a:ext>
             </a:extLst>
           </p:cNvPr>
@@ -18913,7 +18913,7 @@
                     <p:ext uri="{3AFAAA56-56D3-431D-BCD4-E75A35582382}">
                       <p173:tracksInfo xmlns:p173="http://schemas.microsoft.com/office/powerpoint/2017/3/main" displayLoc="slide">
                         <p173:trackLst>
-                          <p173:track id="{5775E651-9A85-439C-ACB4-061F48E37DBB}" label="English (captions)" lang="en-US" r:embed="rId6"/>
+                          <p173:track id="{FAE55126-51E0-4513-84EC-F3482AAA33BF}" label="English (captions)" lang="en-US" r:embed="rId6"/>
                         </p173:trackLst>
                       </p173:tracksInfo>
                     </p:ext>
@@ -18931,7 +18931,7 @@
         </p:blipFill>
         <p:spPr>
           <a:xfrm>
-            <a:off x="127000" y="6350000"/>
+            <a:off x="12446000" y="127000"/>
             <a:ext cx="304800" cy="304800"/>
           </a:xfrm>
           <a:prstGeom prst="rect">
